--- a/HelpResourcesSources/TechnicalNotes/FLEx 9.1 Conceptual Model-basic concepts and resources.pptx
+++ b/HelpResourcesSources/TechnicalNotes/FLEx 9.1 Conceptual Model-basic concepts and resources.pptx
@@ -65,6 +65,7 @@
     <p:sldId id="313" r:id="rId59"/>
     <p:sldId id="314" r:id="rId60"/>
     <p:sldId id="315" r:id="rId61"/>
+    <p:sldId id="317" r:id="rId62"/>
   </p:sldIdLst>
   <p:sldSz cx="12192000" cy="6858000"/>
   <p:notesSz cx="6858000" cy="9144000"/>
@@ -318,7 +319,7 @@
           <a:p>
             <a:fld id="{99FC01E8-584B-4C28-BA44-ECE0F23D4DC2}" type="datetimeFigureOut">
               <a:rPr lang="en-US" smtClean="0"/>
-              <a:t>5/15/2024</a:t>
+              <a:t>6/17/2024</a:t>
             </a:fld>
             <a:endParaRPr lang="en-US"/>
           </a:p>
@@ -516,7 +517,7 @@
           <a:p>
             <a:fld id="{99FC01E8-584B-4C28-BA44-ECE0F23D4DC2}" type="datetimeFigureOut">
               <a:rPr lang="en-US" smtClean="0"/>
-              <a:t>5/15/2024</a:t>
+              <a:t>6/17/2024</a:t>
             </a:fld>
             <a:endParaRPr lang="en-US"/>
           </a:p>
@@ -724,7 +725,7 @@
           <a:p>
             <a:fld id="{99FC01E8-584B-4C28-BA44-ECE0F23D4DC2}" type="datetimeFigureOut">
               <a:rPr lang="en-US" smtClean="0"/>
-              <a:t>5/15/2024</a:t>
+              <a:t>6/17/2024</a:t>
             </a:fld>
             <a:endParaRPr lang="en-US"/>
           </a:p>
@@ -922,7 +923,7 @@
           <a:p>
             <a:fld id="{99FC01E8-584B-4C28-BA44-ECE0F23D4DC2}" type="datetimeFigureOut">
               <a:rPr lang="en-US" smtClean="0"/>
-              <a:t>5/15/2024</a:t>
+              <a:t>6/17/2024</a:t>
             </a:fld>
             <a:endParaRPr lang="en-US"/>
           </a:p>
@@ -1197,7 +1198,7 @@
           <a:p>
             <a:fld id="{99FC01E8-584B-4C28-BA44-ECE0F23D4DC2}" type="datetimeFigureOut">
               <a:rPr lang="en-US" smtClean="0"/>
-              <a:t>5/15/2024</a:t>
+              <a:t>6/17/2024</a:t>
             </a:fld>
             <a:endParaRPr lang="en-US"/>
           </a:p>
@@ -1462,7 +1463,7 @@
           <a:p>
             <a:fld id="{99FC01E8-584B-4C28-BA44-ECE0F23D4DC2}" type="datetimeFigureOut">
               <a:rPr lang="en-US" smtClean="0"/>
-              <a:t>5/15/2024</a:t>
+              <a:t>6/17/2024</a:t>
             </a:fld>
             <a:endParaRPr lang="en-US"/>
           </a:p>
@@ -1874,7 +1875,7 @@
           <a:p>
             <a:fld id="{99FC01E8-584B-4C28-BA44-ECE0F23D4DC2}" type="datetimeFigureOut">
               <a:rPr lang="en-US" smtClean="0"/>
-              <a:t>5/15/2024</a:t>
+              <a:t>6/17/2024</a:t>
             </a:fld>
             <a:endParaRPr lang="en-US"/>
           </a:p>
@@ -2015,7 +2016,7 @@
           <a:p>
             <a:fld id="{99FC01E8-584B-4C28-BA44-ECE0F23D4DC2}" type="datetimeFigureOut">
               <a:rPr lang="en-US" smtClean="0"/>
-              <a:t>5/15/2024</a:t>
+              <a:t>6/17/2024</a:t>
             </a:fld>
             <a:endParaRPr lang="en-US"/>
           </a:p>
@@ -2128,7 +2129,7 @@
           <a:p>
             <a:fld id="{99FC01E8-584B-4C28-BA44-ECE0F23D4DC2}" type="datetimeFigureOut">
               <a:rPr lang="en-US" smtClean="0"/>
-              <a:t>5/15/2024</a:t>
+              <a:t>6/17/2024</a:t>
             </a:fld>
             <a:endParaRPr lang="en-US"/>
           </a:p>
@@ -2439,7 +2440,7 @@
           <a:p>
             <a:fld id="{99FC01E8-584B-4C28-BA44-ECE0F23D4DC2}" type="datetimeFigureOut">
               <a:rPr lang="en-US" smtClean="0"/>
-              <a:t>5/15/2024</a:t>
+              <a:t>6/17/2024</a:t>
             </a:fld>
             <a:endParaRPr lang="en-US"/>
           </a:p>
@@ -2727,7 +2728,7 @@
           <a:p>
             <a:fld id="{99FC01E8-584B-4C28-BA44-ECE0F23D4DC2}" type="datetimeFigureOut">
               <a:rPr lang="en-US" smtClean="0"/>
-              <a:t>5/15/2024</a:t>
+              <a:t>6/17/2024</a:t>
             </a:fld>
             <a:endParaRPr lang="en-US"/>
           </a:p>
@@ -2968,7 +2969,7 @@
           <a:p>
             <a:fld id="{99FC01E8-584B-4C28-BA44-ECE0F23D4DC2}" type="datetimeFigureOut">
               <a:rPr lang="en-US" smtClean="0"/>
-              <a:t>5/15/2024</a:t>
+              <a:t>6/17/2024</a:t>
             </a:fld>
             <a:endParaRPr lang="en-US"/>
           </a:p>
@@ -3608,15 +3609,7 @@
             <a:pPr lvl="1"/>
             <a:r>
               <a:rPr lang="en-US" dirty="0"/>
-              <a:t>Hidden writing systems maintain data in the </a:t>
-            </a:r>
-            <a:r>
-              <a:rPr lang="en-US" dirty="0" err="1"/>
-              <a:t>fwdata</a:t>
-            </a:r>
-            <a:r>
-              <a:rPr lang="en-US" dirty="0"/>
-              <a:t> file, but it is not displayed.</a:t>
+              <a:t>When you hide a writing system, the data remains in the fwdata file, but it is not displayed.</a:t>
             </a:r>
           </a:p>
           <a:p>
@@ -4148,7 +4141,7 @@
             </a:r>
             <a:r>
               <a:rPr lang="en-US" dirty="0"/>
-              <a:t> files that are not shred in S/R.</a:t>
+              <a:t> files that are not shared in S/R.</a:t>
             </a:r>
           </a:p>
           <a:p>
@@ -4874,7 +4867,55 @@
             </a:r>
             <a:r>
               <a:rPr lang="fr-FR" dirty="0"/>
-              <a:t> in the font.</a:t>
+              <a:t> in the font. Dictionary </a:t>
+            </a:r>
+            <a:r>
+              <a:rPr lang="fr-FR" dirty="0" err="1"/>
+              <a:t>view</a:t>
+            </a:r>
+            <a:r>
+              <a:rPr lang="fr-FR" dirty="0"/>
+              <a:t> </a:t>
+            </a:r>
+            <a:r>
+              <a:rPr lang="fr-FR" dirty="0" err="1"/>
+              <a:t>is</a:t>
+            </a:r>
+            <a:r>
+              <a:rPr lang="fr-FR" dirty="0"/>
+              <a:t> a browser </a:t>
+            </a:r>
+            <a:r>
+              <a:rPr lang="fr-FR" dirty="0" err="1"/>
+              <a:t>view</a:t>
+            </a:r>
+            <a:r>
+              <a:rPr lang="fr-FR" dirty="0"/>
+              <a:t> </a:t>
+            </a:r>
+            <a:r>
+              <a:rPr lang="fr-FR" dirty="0" err="1"/>
+              <a:t>that</a:t>
+            </a:r>
+            <a:r>
+              <a:rPr lang="fr-FR" dirty="0"/>
+              <a:t> substitutes </a:t>
+            </a:r>
+            <a:r>
+              <a:rPr lang="fr-FR" dirty="0" err="1"/>
+              <a:t>glyphs</a:t>
+            </a:r>
+            <a:r>
+              <a:rPr lang="fr-FR" dirty="0"/>
+              <a:t> as </a:t>
+            </a:r>
+            <a:r>
+              <a:rPr lang="fr-FR" dirty="0" err="1"/>
+              <a:t>needed</a:t>
+            </a:r>
+            <a:r>
+              <a:rPr lang="fr-FR" dirty="0"/>
+              <a:t>.</a:t>
             </a:r>
           </a:p>
           <a:p>
@@ -5264,20 +5305,6 @@
           <a:p>
             <a:r>
               <a:rPr lang="en-US" dirty="0"/>
-              <a:t>A Run can only have one </a:t>
-            </a:r>
-            <a:r>
-              <a:rPr lang="en-US" dirty="0" err="1"/>
-              <a:t>namedStyle</a:t>
-            </a:r>
-            <a:r>
-              <a:rPr lang="en-US" dirty="0"/>
-              <a:t> element. If you want strong emphasized, you would need to have a single style that combines both features.</a:t>
-            </a:r>
-          </a:p>
-          <a:p>
-            <a:r>
-              <a:rPr lang="en-US" dirty="0"/>
               <a:t>The following shows the Contents of a </a:t>
             </a:r>
             <a:r>
@@ -5287,6 +5314,45 @@
             <a:r>
               <a:rPr lang="en-US" dirty="0"/>
               <a:t> that includes multiple Runs with changes of writing system and styles.</a:t>
+            </a:r>
+            <a:br>
+              <a:rPr lang="en-US" dirty="0"/>
+            </a:br>
+            <a:r>
+              <a:rPr lang="en-US" dirty="0"/>
+              <a:t>Some English with </a:t>
+            </a:r>
+            <a:r>
+              <a:rPr lang="en-US" i="1" dirty="0"/>
+              <a:t>emphasized</a:t>
+            </a:r>
+            <a:r>
+              <a:rPr lang="en-US" dirty="0"/>
+              <a:t> and </a:t>
+            </a:r>
+            <a:r>
+              <a:rPr lang="en-US" b="1" dirty="0"/>
+              <a:t>bold</a:t>
+            </a:r>
+            <a:r>
+              <a:rPr lang="en-US" dirty="0"/>
+              <a:t> text. (French: </a:t>
+            </a:r>
+            <a:r>
+              <a:rPr lang="en-US" dirty="0" err="1"/>
+              <a:t>francais</a:t>
+            </a:r>
+            <a:r>
+              <a:rPr lang="en-US" dirty="0"/>
+              <a:t> [</a:t>
+            </a:r>
+            <a:r>
+              <a:rPr lang="en-US" dirty="0" err="1"/>
+              <a:t>fʁɑ̃sɛ</a:t>
+            </a:r>
+            <a:r>
+              <a:rPr lang="en-US" dirty="0"/>
+              <a:t>]</a:t>
             </a:r>
             <a:br>
               <a:rPr lang="en-US" dirty="0"/>
@@ -5646,6 +5712,20 @@
             <a:r>
               <a:rPr lang="en-US" dirty="0"/>
               <a:t>&lt;/Contents&gt;</a:t>
+            </a:r>
+          </a:p>
+          <a:p>
+            <a:r>
+              <a:rPr lang="en-US" dirty="0"/>
+              <a:t>A Run can only have one </a:t>
+            </a:r>
+            <a:r>
+              <a:rPr lang="en-US" dirty="0" err="1"/>
+              <a:t>namedStyle</a:t>
+            </a:r>
+            <a:r>
+              <a:rPr lang="en-US" dirty="0"/>
+              <a:t> element. If you want strong emphasized, you would need to have a single style that combines both features.</a:t>
             </a:r>
           </a:p>
           <a:p>
@@ -5998,6 +6078,13 @@
               <a:rPr lang="en-US" dirty="0"/>
               <a:t>&lt;/Contents&gt;</a:t>
             </a:r>
+            <a:br>
+              <a:rPr lang="en-US" dirty="0"/>
+            </a:br>
+            <a:r>
+              <a:rPr lang="en-US" dirty="0"/>
+              <a:t>These links can be added to documents such as Word and html files.</a:t>
+            </a:r>
           </a:p>
           <a:p>
             <a:endParaRPr lang="en-US" dirty="0"/>
@@ -6287,7 +6374,7 @@
           <a:p>
             <a:r>
               <a:rPr lang="en-US" dirty="0"/>
-              <a:t>Writing systems (</a:t>
+              <a:t>Writing systems in a MultiUnicode </a:t>
             </a:r>
             <a:r>
               <a:rPr lang="en-US" dirty="0" err="1"/>
@@ -6295,7 +6382,7 @@
             </a:r>
             <a:r>
               <a:rPr lang="en-US" dirty="0"/>
-              <a:t>) in a MultiUnicode field must be unique.</a:t>
+              <a:t> element must be unique.</a:t>
             </a:r>
           </a:p>
           <a:p>
@@ -6349,32 +6436,52 @@
             <p:ph idx="1"/>
           </p:nvPr>
         </p:nvSpPr>
-        <p:spPr/>
+        <p:spPr>
+          <a:xfrm>
+            <a:off x="914400" y="1253330"/>
+            <a:ext cx="10515600" cy="4918869"/>
+          </a:xfrm>
+        </p:spPr>
         <p:txBody>
-          <a:bodyPr/>
+          <a:bodyPr>
+            <a:normAutofit fontScale="92500" lnSpcReduction="10000"/>
+          </a:bodyPr>
           <a:lstStyle/>
           <a:p>
             <a:r>
               <a:rPr lang="en-US" dirty="0"/>
-              <a:t>Basic concepts, fwdata file, and resources available.</a:t>
-            </a:r>
-          </a:p>
-          <a:p>
-            <a:r>
-              <a:rPr lang="en-US" dirty="0"/>
-              <a:t>Lexicon model</a:t>
-            </a:r>
-          </a:p>
-          <a:p>
-            <a:r>
-              <a:rPr lang="en-US" dirty="0"/>
-              <a:t>Grammar basics, Interlinear, and Notebook models</a:t>
-            </a:r>
-          </a:p>
-          <a:p>
-            <a:r>
-              <a:rPr lang="en-US" dirty="0"/>
-              <a:t>FLEx 9.1 Conceptual Model documentation covered in these webinars is available here:</a:t>
+              <a:t>Introduction</a:t>
+            </a:r>
+          </a:p>
+          <a:p>
+            <a:r>
+              <a:rPr lang="en-US" dirty="0"/>
+              <a:t>Today: Basic concepts, how data is stored, and resources available</a:t>
+            </a:r>
+          </a:p>
+          <a:p>
+            <a:r>
+              <a:rPr lang="en-US" dirty="0"/>
+              <a:t>Thursday: Lexicon model and some Grammar</a:t>
+            </a:r>
+          </a:p>
+          <a:p>
+            <a:r>
+              <a:rPr lang="en-US" dirty="0"/>
+              <a:t>Tuesday: Some Grammar, Interlinear, and Notebook models</a:t>
+            </a:r>
+          </a:p>
+          <a:p>
+            <a:r>
+              <a:rPr lang="en-US" dirty="0"/>
+              <a:t>FLEx 9.1 Conceptual Model documentation covered in these webinars is available as “FLEx 9.1 Conceptual model.pdf”</a:t>
+            </a:r>
+            <a:br>
+              <a:rPr lang="en-US" dirty="0"/>
+            </a:br>
+            <a:r>
+              <a:rPr lang="en-US" dirty="0"/>
+              <a:t>in software.sil.org/fieldworks/support/technical-documents</a:t>
             </a:r>
             <a:br>
               <a:rPr lang="en-US" dirty="0"/>
@@ -6387,8 +6494,15 @@
             </a:r>
             <a:r>
               <a:rPr lang="en-US" dirty="0"/>
-              <a:t> (The file also has a link to a Flex 9.1 sample project used in this document/)</a:t>
-            </a:r>
+              <a:t> (The file also has a link to a Flex 9.1 sample project used in this document, as well as the three PowerPoint presentations.)</a:t>
+            </a:r>
+            <a:br>
+              <a:rPr lang="en-US" dirty="0"/>
+            </a:br>
+            <a:br>
+              <a:rPr lang="en-US" dirty="0"/>
+            </a:br>
+            <a:endParaRPr lang="en-US" dirty="0"/>
           </a:p>
           <a:p>
             <a:endParaRPr lang="en-US" dirty="0"/>
@@ -6422,17 +6536,10 @@
         </p:spPr>
         <p:txBody>
           <a:bodyPr>
-            <a:normAutofit fontScale="90000"/>
+            <a:normAutofit/>
           </a:bodyPr>
           <a:lstStyle/>
           <a:p>
-            <a:r>
-              <a:rPr lang="en-US" dirty="0"/>
-              <a:t>Under the hood of</a:t>
-            </a:r>
-            <a:br>
-              <a:rPr lang="en-US" dirty="0"/>
-            </a:br>
             <a:r>
               <a:rPr lang="en-US" dirty="0"/>
               <a:t>FieldWorks Language Explorer (FLEx)</a:t>
@@ -6753,7 +6860,7 @@
           <a:p>
             <a:r>
               <a:rPr lang="en-US" dirty="0"/>
-              <a:t>Writing systems (</a:t>
+              <a:t>Writing systems in a MultiString </a:t>
             </a:r>
             <a:r>
               <a:rPr lang="en-US" dirty="0" err="1"/>
@@ -6761,7 +6868,7 @@
             </a:r>
             <a:r>
               <a:rPr lang="en-US" dirty="0"/>
-              <a:t>) in a MultiString field must be unique.</a:t>
+              <a:t> field must be unique.</a:t>
             </a:r>
           </a:p>
           <a:p>
@@ -7410,7 +7517,7 @@
             </a:r>
             <a:r>
               <a:rPr lang="en-US" dirty="0"/>
-              <a:t> (handle to a viewable object). This is a single integer that is assigned to each object when it is loaded. While in memory, it is a reliable and quick way to find and reference objects. However, the next time the project is loaded, especially if objects were added or deleted, it can affect some or all of the </a:t>
+              <a:t> (handle to a viewable object). This is a single integer that is assigned to each object when it is loaded. While in memory, it is a reliable and quick way to find and reference objects. However, the next time the project is loaded, especially if objects were added or deleted, some or all of the </a:t>
             </a:r>
             <a:r>
               <a:rPr lang="en-US" dirty="0" err="1"/>
@@ -7418,7 +7525,7 @@
             </a:r>
             <a:r>
               <a:rPr lang="en-US" dirty="0"/>
-              <a:t> the next time it is loaded. In debugging it’s often challenging to find a guid for an object when all you have is the </a:t>
+              <a:t> could be different. In debugging it’s often challenging to find a guid for an object when all you have is the </a:t>
             </a:r>
             <a:r>
               <a:rPr lang="en-US" dirty="0" err="1"/>
@@ -7714,7 +7821,7 @@
             </a:r>
             <a:r>
               <a:rPr lang="en-US" dirty="0"/>
-              <a:t>="Normal"&gt;&lt;/Prop&gt;</a:t>
+              <a:t>="Normal“ /Prop&gt;</a:t>
             </a:r>
             <a:br>
               <a:rPr lang="en-US" dirty="0"/>
@@ -8779,7 +8886,15 @@
             </a:r>
             <a:r>
               <a:rPr lang="en-US" dirty="0"/>
-              <a:t>, or via LCM code (e.g., FLEx Tools), it deletes the object and all objects in its ownership hierarchy. This will properly remove the objects plus all owning and reference links to all of the deleted objects.</a:t>
+              <a:t>, or via LCM code (e.g., </a:t>
+            </a:r>
+            <a:r>
+              <a:rPr lang="en-US" dirty="0" err="1"/>
+              <a:t>FlexTools</a:t>
+            </a:r>
+            <a:r>
+              <a:rPr lang="en-US" dirty="0"/>
+              <a:t>), it deletes the object and all objects in its ownership hierarchy. This will properly remove the objects plus all owning and reference links to all of the deleted objects.</a:t>
             </a:r>
           </a:p>
           <a:p>
@@ -8894,7 +9009,7 @@
         </p:spPr>
         <p:txBody>
           <a:bodyPr>
-            <a:normAutofit/>
+            <a:normAutofit lnSpcReduction="10000"/>
           </a:bodyPr>
           <a:lstStyle/>
           <a:p>
@@ -8982,14 +9097,19 @@
               <a:rPr lang="en-US" dirty="0"/>
               <a:t>%\SIL</a:t>
             </a:r>
-          </a:p>
-          <a:p>
-            <a:pPr marL="0" lvl="0" indent="0">
-              <a:buNone/>
-            </a:pPr>
+            <a:br>
+              <a:rPr lang="en-US" dirty="0"/>
+            </a:br>
             <a:r>
               <a:rPr lang="en-US" dirty="0"/>
               <a:t>Registry: HKLM &amp; HKCU)\Software\SIL\Fieldworks</a:t>
+            </a:r>
+            <a:br>
+              <a:rPr lang="en-US" dirty="0"/>
+            </a:br>
+            <a:r>
+              <a:rPr lang="en-US" dirty="0"/>
+              <a:t>Windows Environment variables.</a:t>
             </a:r>
           </a:p>
           <a:p>
@@ -10170,7 +10290,7 @@
         </p:spPr>
         <p:txBody>
           <a:bodyPr>
-            <a:normAutofit fontScale="92500" lnSpcReduction="20000"/>
+            <a:normAutofit fontScale="85000" lnSpcReduction="20000"/>
           </a:bodyPr>
           <a:lstStyle/>
           <a:p>
@@ -10381,24 +10501,48 @@
               <a:rPr lang="en-US" dirty="0"/>
             </a:br>
             <a:r>
-              <a:rPr lang="en-US" dirty="0"/>
+              <a:rPr lang="en-US" dirty="0">
+                <a:highlight>
+                  <a:srgbClr val="FF00FF"/>
+                </a:highlight>
+              </a:rPr>
               <a:t>&lt;</a:t>
             </a:r>
             <a:r>
-              <a:rPr lang="en-US" dirty="0" err="1"/>
+              <a:rPr lang="en-US" dirty="0" err="1">
+                <a:highlight>
+                  <a:srgbClr val="FF00FF"/>
+                </a:highlight>
+              </a:rPr>
               <a:t>ItemClsid</a:t>
             </a:r>
             <a:r>
-              <a:rPr lang="en-US" dirty="0"/>
+              <a:rPr lang="en-US" dirty="0">
+                <a:highlight>
+                  <a:srgbClr val="FF00FF"/>
+                </a:highlight>
+              </a:rPr>
               <a:t> </a:t>
             </a:r>
             <a:r>
-              <a:rPr lang="en-US" dirty="0" err="1"/>
+              <a:rPr lang="en-US" dirty="0" err="1">
+                <a:highlight>
+                  <a:srgbClr val="FF00FF"/>
+                </a:highlight>
+              </a:rPr>
               <a:t>val</a:t>
             </a:r>
             <a:r>
-              <a:rPr lang="en-US" dirty="0"/>
-              <a:t>="7" /&gt;		(</a:t>
+              <a:rPr lang="en-US" dirty="0">
+                <a:highlight>
+                  <a:srgbClr val="FF00FF"/>
+                </a:highlight>
+              </a:rPr>
+              <a:t>="7" /&gt;</a:t>
+            </a:r>
+            <a:r>
+              <a:rPr lang="en-US" dirty="0"/>
+              <a:t>		(</a:t>
             </a:r>
             <a:r>
               <a:rPr lang="en-US" dirty="0" err="1"/>
@@ -10506,24 +10650,48 @@
               <a:rPr lang="en-US" dirty="0"/>
             </a:br>
             <a:r>
-              <a:rPr lang="en-US" dirty="0"/>
+              <a:rPr lang="en-US" dirty="0">
+                <a:highlight>
+                  <a:srgbClr val="FF00FF"/>
+                </a:highlight>
+              </a:rPr>
               <a:t>&lt;</a:t>
             </a:r>
             <a:r>
-              <a:rPr lang="en-US" dirty="0" err="1"/>
+              <a:rPr lang="en-US" dirty="0" err="1">
+                <a:highlight>
+                  <a:srgbClr val="FF00FF"/>
+                </a:highlight>
+              </a:rPr>
               <a:t>WsSelector</a:t>
             </a:r>
             <a:r>
-              <a:rPr lang="en-US" dirty="0"/>
+              <a:rPr lang="en-US" dirty="0">
+                <a:highlight>
+                  <a:srgbClr val="FF00FF"/>
+                </a:highlight>
+              </a:rPr>
               <a:t> </a:t>
             </a:r>
             <a:r>
-              <a:rPr lang="en-US" dirty="0" err="1"/>
+              <a:rPr lang="en-US" dirty="0" err="1">
+                <a:highlight>
+                  <a:srgbClr val="FF00FF"/>
+                </a:highlight>
+              </a:rPr>
               <a:t>val</a:t>
             </a:r>
             <a:r>
-              <a:rPr lang="en-US" dirty="0"/>
-              <a:t>="-3" /&gt;		(All checked analysis writing systems)</a:t>
+              <a:rPr lang="en-US" dirty="0">
+                <a:highlight>
+                  <a:srgbClr val="FF00FF"/>
+                </a:highlight>
+              </a:rPr>
+              <a:t>="-3" /&gt;</a:t>
+            </a:r>
+            <a:r>
+              <a:rPr lang="en-US" dirty="0"/>
+              <a:t>		(All checked analysis writing systems)</a:t>
             </a:r>
             <a:br>
               <a:rPr lang="en-US" dirty="0"/>
@@ -11994,7 +12162,11 @@
               <a:buNone/>
             </a:pPr>
             <a:r>
-              <a:rPr lang="en-US" dirty="0"/>
+              <a:rPr lang="en-US" dirty="0">
+                <a:solidFill>
+                  <a:srgbClr val="FF0000"/>
+                </a:solidFill>
+              </a:rPr>
               <a:t>Backup fwdata before making any changes!!</a:t>
             </a:r>
           </a:p>
@@ -15314,7 +15486,7 @@
           <a:p>
             <a:r>
               <a:rPr lang="en-US" dirty="0"/>
-              <a:t>Data in memory is Normalization Form Decomposed (NFD) [à = U+0061 U+0300]</a:t>
+              <a:t>Data in memory uses Normalization Form Decomposed (NFD) [à = U+0061 U+0300]</a:t>
             </a:r>
           </a:p>
           <a:p>
@@ -17161,13 +17333,17 @@
         </p:spPr>
         <p:txBody>
           <a:bodyPr>
-            <a:normAutofit fontScale="92500" lnSpcReduction="10000"/>
+            <a:normAutofit fontScale="92500" lnSpcReduction="20000"/>
           </a:bodyPr>
           <a:lstStyle/>
           <a:p>
             <a:r>
-              <a:rPr lang="en-US" dirty="0"/>
-              <a:t>A useful model diagram can be downloaded from </a:t>
+              <a:rPr lang="en-US"/>
+              <a:t>Useful model diagrams </a:t>
+            </a:r>
+            <a:r>
+              <a:rPr lang="en-US" dirty="0"/>
+              <a:t>can be downloaded from </a:t>
             </a:r>
             <a:r>
               <a:rPr lang="en-US" u="sng" dirty="0">
@@ -17183,7 +17359,7 @@
           <a:p>
             <a:r>
               <a:rPr lang="en-US" dirty="0"/>
-              <a:t>Unfortunately, the program that was used to develop this disappeared many years ago, so we haven’t been able to keep it up with the latest changes. However, for the most part it is still accurate and helpful. Interlinear text is not correct, and directional links for reversal indexes are wrong, and some newer things are missing. It also has all of the classes for Scripture used by Translation Editor which no longer exists. Basic Scripture classes are still used when loading data from </a:t>
+              <a:t>This was constructed by hand, so may have some errors. Unfortunately, the program that was used to develop this disappeared many years ago, so we haven’t been able to keep it up with the latest changes. However, for the most part it is still accurate and helpful. Interlinear text is not correct, and directional links for reversal indexes are wrong, and some newer things are missing. It also has all of the classes for Scripture used by Translation Editor which no longer exists. Basic Scripture classes are still used when loading data from </a:t>
             </a:r>
             <a:r>
               <a:rPr lang="en-US" dirty="0" err="1"/>
@@ -17300,7 +17476,7 @@
         </p:spPr>
         <p:txBody>
           <a:bodyPr>
-            <a:normAutofit fontScale="92500" lnSpcReduction="10000"/>
+            <a:normAutofit fontScale="92500"/>
           </a:bodyPr>
           <a:lstStyle/>
           <a:p>
@@ -17310,7 +17486,7 @@
             </a:r>
             <a:r>
               <a:rPr lang="en-US" dirty="0" err="1"/>
-              <a:t>LibLcm</a:t>
+              <a:t>liblcm</a:t>
             </a:r>
             <a:r>
               <a:rPr lang="en-US" dirty="0"/>
@@ -17322,23 +17498,23 @@
             </a:r>
             <a:r>
               <a:rPr lang="en-US" dirty="0"/>
+              <a:t> \</a:t>
+            </a:r>
+            <a:r>
+              <a:rPr lang="en-US" dirty="0" err="1"/>
+              <a:t>SIL.LCModel</a:t>
+            </a:r>
+            <a:r>
+              <a:rPr lang="en-US" dirty="0"/>
               <a:t>\</a:t>
             </a:r>
             <a:r>
               <a:rPr lang="en-US" dirty="0" err="1"/>
-              <a:t>SIL.LCModel</a:t>
-            </a:r>
-            <a:r>
-              <a:rPr lang="en-US" dirty="0"/>
-              <a:t>\</a:t>
-            </a:r>
-            <a:r>
-              <a:rPr lang="en-US" dirty="0" err="1"/>
               <a:t>src</a:t>
             </a:r>
             <a:r>
               <a:rPr lang="en-US" dirty="0"/>
-              <a:t>. MasterLCModel.xsd defines the XML structure in this file. You can get to this file directly from </a:t>
+              <a:t>. You can get to this file directly from </a:t>
             </a:r>
             <a:r>
               <a:rPr lang="en-US" u="sng" dirty="0">
@@ -17348,7 +17524,7 @@
             </a:r>
             <a:r>
               <a:rPr lang="en-US" dirty="0"/>
-              <a:t>.</a:t>
+              <a:t>. MasterLCModel.xsd defines the XML structure in this file. </a:t>
             </a:r>
           </a:p>
           <a:p>
@@ -17461,7 +17637,7 @@
         </p:spPr>
         <p:txBody>
           <a:bodyPr>
-            <a:normAutofit fontScale="92500"/>
+            <a:normAutofit lnSpcReduction="10000"/>
           </a:bodyPr>
           <a:lstStyle/>
           <a:p>
@@ -17550,23 +17726,7 @@
             </a:r>
             <a:r>
               <a:rPr lang="en-US" dirty="0"/>
-              <a:t>: If you set </a:t>
-            </a:r>
-            <a:r>
-              <a:rPr lang="en-US" dirty="0" err="1"/>
-              <a:t>generateBasicCreateMethod</a:t>
-            </a:r>
-            <a:r>
-              <a:rPr lang="en-US" dirty="0"/>
-              <a:t> to false then it will not put a </a:t>
-            </a:r>
-            <a:r>
-              <a:rPr lang="en-US" dirty="0" err="1"/>
-              <a:t>parameterless</a:t>
-            </a:r>
-            <a:r>
-              <a:rPr lang="en-US" dirty="0"/>
-              <a:t> Create method in the generated code. That means that you will have to define your own Create method in the Overrides in both the factory and the class overrides.</a:t>
+              <a:t>: When false, this class cannot be created in code with a Create() method. Check for required parameters in overrides in both the factory and the class overrides.</a:t>
             </a:r>
           </a:p>
           <a:p>
@@ -17708,7 +17868,7 @@
             <a:pPr lvl="1"/>
             <a:r>
               <a:rPr lang="en-US" dirty="0"/>
-              <a:t>Type: The type of field . bas for basic, own for owning, </a:t>
+              <a:t>Type: The type of field: bas for basic, own for owning, </a:t>
             </a:r>
             <a:r>
               <a:rPr lang="en-US" dirty="0" err="1"/>
@@ -18605,7 +18765,7 @@
         </p:spPr>
         <p:txBody>
           <a:bodyPr>
-            <a:normAutofit fontScale="92500" lnSpcReduction="10000"/>
+            <a:normAutofit/>
           </a:bodyPr>
           <a:lstStyle/>
           <a:p>
@@ -18655,21 +18815,16 @@
           <a:p>
             <a:r>
               <a:rPr lang="en-US" dirty="0"/>
-              <a:t>Debugging can also be done without installing any program. Download dnSpy-net-win64.zip from </a:t>
-            </a:r>
-            <a:r>
-              <a:rPr lang="en-US" u="sng" dirty="0">
-                <a:hlinkClick r:id="rId3"/>
-              </a:rPr>
-              <a:t>https://github.com/0xd4d/dnSpy/releases</a:t>
-            </a:r>
-            <a:r>
-              <a:rPr lang="en-US" dirty="0"/>
-              <a:t>. Unzip the file into a directory, and run dnSpy.exe from the directory. To start Flex in the debugger, open FieldWorks.exe from the debugger, or drag it into the debugger. Right-click FieldWorks.exe in left pane and choose Go to Entry Point. Then click the green Start button in the toolbar to start debugging. Click OK to the Debug Program dialog.</a:t>
-            </a:r>
-          </a:p>
-          <a:p>
-            <a:endParaRPr lang="en-US" dirty="0"/>
+              <a:t>Debugging can also be done without installing any program using </a:t>
+            </a:r>
+            <a:r>
+              <a:rPr lang="en-US" dirty="0" err="1"/>
+              <a:t>dnSpy</a:t>
+            </a:r>
+            <a:r>
+              <a:rPr lang="en-US" dirty="0"/>
+              <a:t>.</a:t>
+            </a:r>
           </a:p>
         </p:txBody>
       </p:sp>
@@ -18677,6 +18832,236 @@
     <p:extLst>
       <p:ext uri="{BB962C8B-B14F-4D97-AF65-F5344CB8AC3E}">
         <p14:creationId xmlns:p14="http://schemas.microsoft.com/office/powerpoint/2010/main" val="1227939435"/>
+      </p:ext>
+    </p:extLst>
+  </p:cSld>
+  <p:clrMapOvr>
+    <a:masterClrMapping/>
+  </p:clrMapOvr>
+</p:sld>
+</file>
+
+<file path=ppt/slides/slide61.xml><?xml version="1.0" encoding="utf-8"?>
+<p:sld xmlns:a="http://schemas.openxmlformats.org/drawingml/2006/main" xmlns:r="http://schemas.openxmlformats.org/officeDocument/2006/relationships" xmlns:p="http://schemas.openxmlformats.org/presentationml/2006/main">
+  <p:cSld>
+    <p:spTree>
+      <p:nvGrpSpPr>
+        <p:cNvPr id="1" name=""/>
+        <p:cNvGrpSpPr/>
+        <p:nvPr/>
+      </p:nvGrpSpPr>
+      <p:grpSpPr>
+        <a:xfrm>
+          <a:off x="0" y="0"/>
+          <a:ext cx="0" cy="0"/>
+          <a:chOff x="0" y="0"/>
+          <a:chExt cx="0" cy="0"/>
+        </a:xfrm>
+      </p:grpSpPr>
+      <p:sp>
+        <p:nvSpPr>
+          <p:cNvPr id="2" name="Title 1">
+            <a:extLst>
+              <a:ext uri="{FF2B5EF4-FFF2-40B4-BE49-F238E27FC236}">
+                <a16:creationId xmlns:a16="http://schemas.microsoft.com/office/drawing/2014/main" id="{245851E7-F4E9-48EC-AE40-F54F68652486}"/>
+              </a:ext>
+            </a:extLst>
+          </p:cNvPr>
+          <p:cNvSpPr>
+            <a:spLocks noGrp="1"/>
+          </p:cNvSpPr>
+          <p:nvPr>
+            <p:ph type="title"/>
+          </p:nvPr>
+        </p:nvSpPr>
+        <p:spPr>
+          <a:xfrm>
+            <a:off x="838200" y="136525"/>
+            <a:ext cx="10515600" cy="803275"/>
+          </a:xfrm>
+        </p:spPr>
+        <p:txBody>
+          <a:bodyPr>
+            <a:normAutofit/>
+          </a:bodyPr>
+          <a:lstStyle/>
+          <a:p>
+            <a:r>
+              <a:rPr lang="en-US" dirty="0"/>
+              <a:t>Conceptual model resources – </a:t>
+            </a:r>
+            <a:r>
+              <a:rPr lang="en-US" dirty="0" err="1"/>
+              <a:t>dnSpy</a:t>
+            </a:r>
+            <a:endParaRPr lang="en-US" dirty="0"/>
+          </a:p>
+        </p:txBody>
+      </p:sp>
+      <p:sp>
+        <p:nvSpPr>
+          <p:cNvPr id="3" name="Content Placeholder 2">
+            <a:extLst>
+              <a:ext uri="{FF2B5EF4-FFF2-40B4-BE49-F238E27FC236}">
+                <a16:creationId xmlns:a16="http://schemas.microsoft.com/office/drawing/2014/main" id="{AE2723E6-B39B-4BD9-A44E-978955F1DB4F}"/>
+              </a:ext>
+            </a:extLst>
+          </p:cNvPr>
+          <p:cNvSpPr>
+            <a:spLocks noGrp="1"/>
+          </p:cNvSpPr>
+          <p:nvPr>
+            <p:ph idx="1"/>
+          </p:nvPr>
+        </p:nvSpPr>
+        <p:spPr>
+          <a:xfrm>
+            <a:off x="838200" y="939800"/>
+            <a:ext cx="10515600" cy="5681133"/>
+          </a:xfrm>
+        </p:spPr>
+        <p:txBody>
+          <a:bodyPr>
+            <a:normAutofit/>
+          </a:bodyPr>
+          <a:lstStyle/>
+          <a:p>
+            <a:r>
+              <a:rPr lang="en-US" dirty="0"/>
+              <a:t>If interested in exploring FLEx using a debugger, there is a free .NET debugger that can be used on any machine without installing any software. </a:t>
+            </a:r>
+          </a:p>
+          <a:p>
+            <a:r>
+              <a:rPr lang="en-US" dirty="0"/>
+              <a:t>To use </a:t>
+            </a:r>
+            <a:r>
+              <a:rPr lang="en-US" dirty="0" err="1"/>
+              <a:t>dnSpy</a:t>
+            </a:r>
+            <a:endParaRPr lang="en-US" dirty="0"/>
+          </a:p>
+          <a:p>
+            <a:pPr marL="914400" lvl="1" indent="-457200">
+              <a:buFont typeface="+mj-lt"/>
+              <a:buAutoNum type="arabicPeriod"/>
+            </a:pPr>
+            <a:r>
+              <a:rPr lang="en-US" dirty="0"/>
+              <a:t>Download dnSpy-net-win64.zip from </a:t>
+            </a:r>
+            <a:r>
+              <a:rPr lang="en-US" u="sng" dirty="0">
+                <a:hlinkClick r:id="rId2"/>
+              </a:rPr>
+              <a:t>https://github.com/dnSpy/dnSpy/releases</a:t>
+            </a:r>
+            <a:r>
+              <a:rPr lang="en-US" dirty="0"/>
+              <a:t>.</a:t>
+            </a:r>
+          </a:p>
+          <a:p>
+            <a:pPr marL="914400" lvl="1" indent="-457200">
+              <a:buFont typeface="+mj-lt"/>
+              <a:buAutoNum type="arabicPeriod"/>
+            </a:pPr>
+            <a:r>
+              <a:rPr lang="en-US" dirty="0"/>
+              <a:t>Unzip the file into a directory.</a:t>
+            </a:r>
+          </a:p>
+          <a:p>
+            <a:pPr marL="914400" lvl="1" indent="-457200">
+              <a:buFont typeface="+mj-lt"/>
+              <a:buAutoNum type="arabicPeriod"/>
+            </a:pPr>
+            <a:r>
+              <a:rPr lang="en-US" dirty="0"/>
+              <a:t>Run dnSpy.exe from the unzipped directory.</a:t>
+            </a:r>
+          </a:p>
+          <a:p>
+            <a:pPr marL="914400" lvl="1" indent="-457200">
+              <a:buFont typeface="+mj-lt"/>
+              <a:buAutoNum type="arabicPeriod"/>
+            </a:pPr>
+            <a:r>
+              <a:rPr lang="en-US" dirty="0"/>
+              <a:t>Drag C:\Program Files\SIL\FieldWorks 9\FieldWorks.exe into the left Assembly Explorer pane in </a:t>
+            </a:r>
+            <a:r>
+              <a:rPr lang="en-US" dirty="0" err="1"/>
+              <a:t>dnSpy</a:t>
+            </a:r>
+            <a:r>
+              <a:rPr lang="en-US" dirty="0"/>
+              <a:t>.</a:t>
+            </a:r>
+          </a:p>
+          <a:p>
+            <a:pPr marL="914400" lvl="1" indent="-457200">
+              <a:buFont typeface="+mj-lt"/>
+              <a:buAutoNum type="arabicPeriod"/>
+            </a:pPr>
+            <a:r>
+              <a:rPr lang="en-US" dirty="0"/>
+              <a:t>Right-click FieldWorks in the Assembly Explorer.</a:t>
+            </a:r>
+          </a:p>
+          <a:p>
+            <a:pPr marL="914400" lvl="1" indent="-457200">
+              <a:buFont typeface="+mj-lt"/>
+              <a:buAutoNum type="arabicPeriod"/>
+            </a:pPr>
+            <a:r>
+              <a:rPr lang="en-US" dirty="0"/>
+              <a:t>Choose “Go to Entry Point”. </a:t>
+            </a:r>
+          </a:p>
+          <a:p>
+            <a:pPr marL="914400" lvl="1" indent="-457200">
+              <a:buFont typeface="+mj-lt"/>
+              <a:buAutoNum type="arabicPeriod"/>
+            </a:pPr>
+            <a:r>
+              <a:rPr lang="en-US" dirty="0"/>
+              <a:t>Click the Start button at the top, or press F5. </a:t>
+            </a:r>
+          </a:p>
+          <a:p>
+            <a:pPr marL="914400" lvl="1" indent="-457200">
+              <a:buFont typeface="+mj-lt"/>
+              <a:buAutoNum type="arabicPeriod"/>
+            </a:pPr>
+            <a:r>
+              <a:rPr lang="en-US" dirty="0"/>
+              <a:t>Click OK to the initial dialog.</a:t>
+            </a:r>
+          </a:p>
+          <a:p>
+            <a:pPr marL="457200" lvl="1" indent="0">
+              <a:buNone/>
+            </a:pPr>
+            <a:endParaRPr lang="en-US" dirty="0"/>
+          </a:p>
+          <a:p>
+            <a:pPr lvl="1"/>
+            <a:endParaRPr lang="en-US" dirty="0"/>
+          </a:p>
+          <a:p>
+            <a:endParaRPr lang="en-US" dirty="0"/>
+          </a:p>
+          <a:p>
+            <a:endParaRPr lang="en-US" dirty="0"/>
+          </a:p>
+        </p:txBody>
+      </p:sp>
+    </p:spTree>
+    <p:extLst>
+      <p:ext uri="{BB962C8B-B14F-4D97-AF65-F5344CB8AC3E}">
+        <p14:creationId xmlns:p14="http://schemas.microsoft.com/office/powerpoint/2010/main" val="11491071"/>
       </p:ext>
     </p:extLst>
   </p:cSld>
@@ -18788,7 +19173,7 @@
             </a:r>
             <a:r>
               <a:rPr lang="en-US" dirty="0"/>
-              <a:t> files is defined in Unicode Technical Standard #35 (</a:t>
+              <a:t> files as defined in Unicode Technical Standard #35 (</a:t>
             </a:r>
             <a:r>
               <a:rPr lang="en-US" u="sng" dirty="0">
@@ -19117,15 +19502,7 @@
           <a:p>
             <a:r>
               <a:rPr lang="en-US" dirty="0"/>
-              <a:t>The writing system tag in a </a:t>
-            </a:r>
-            <a:r>
-              <a:rPr lang="en-US" dirty="0" err="1"/>
-              <a:t>fwdata</a:t>
-            </a:r>
-            <a:r>
-              <a:rPr lang="en-US" dirty="0"/>
-              <a:t> string property corresponds to the </a:t>
+              <a:t>The writing system tag in a fwdata string property corresponds to the </a:t>
             </a:r>
             <a:r>
               <a:rPr lang="en-US" dirty="0" err="1"/>
@@ -19133,7 +19510,7 @@
             </a:r>
             <a:r>
               <a:rPr lang="en-US" dirty="0"/>
-              <a:t> file name, except in rare migrations from an older system where it then uses the internal identity (</a:t>
+              <a:t> file name, except in rare migrations from an older system where it then uses the internal identity (e.g., </a:t>
             </a:r>
             <a:r>
               <a:rPr lang="en-US" dirty="0" err="1"/>
@@ -19267,7 +19644,7 @@
           <a:p>
             <a:r>
               <a:rPr lang="en-US" dirty="0"/>
-              <a:t>A global writing system folder is stored in C:\ProgramData\SIL\WritingSystemRepository\3</a:t>
+              <a:t>A global writing system folder is stored at C:\ProgramData\SIL\WritingSystemRepository\3</a:t>
             </a:r>
           </a:p>
           <a:p>

--- a/HelpResourcesSources/TechnicalNotes/FLEx 9.1 Conceptual Model-basic concepts and resources.pptx
+++ b/HelpResourcesSources/TechnicalNotes/FLEx 9.1 Conceptual Model-basic concepts and resources.pptx
@@ -66,6 +66,7 @@
     <p:sldId id="314" r:id="rId60"/>
     <p:sldId id="315" r:id="rId61"/>
     <p:sldId id="317" r:id="rId62"/>
+    <p:sldId id="318" r:id="rId63"/>
   </p:sldIdLst>
   <p:sldSz cx="12192000" cy="6858000"/>
   <p:notesSz cx="6858000" cy="9144000"/>
@@ -319,7 +320,7 @@
           <a:p>
             <a:fld id="{99FC01E8-584B-4C28-BA44-ECE0F23D4DC2}" type="datetimeFigureOut">
               <a:rPr lang="en-US" smtClean="0"/>
-              <a:t>6/17/2024</a:t>
+              <a:t>6/18/2024</a:t>
             </a:fld>
             <a:endParaRPr lang="en-US"/>
           </a:p>
@@ -517,7 +518,7 @@
           <a:p>
             <a:fld id="{99FC01E8-584B-4C28-BA44-ECE0F23D4DC2}" type="datetimeFigureOut">
               <a:rPr lang="en-US" smtClean="0"/>
-              <a:t>6/17/2024</a:t>
+              <a:t>6/18/2024</a:t>
             </a:fld>
             <a:endParaRPr lang="en-US"/>
           </a:p>
@@ -725,7 +726,7 @@
           <a:p>
             <a:fld id="{99FC01E8-584B-4C28-BA44-ECE0F23D4DC2}" type="datetimeFigureOut">
               <a:rPr lang="en-US" smtClean="0"/>
-              <a:t>6/17/2024</a:t>
+              <a:t>6/18/2024</a:t>
             </a:fld>
             <a:endParaRPr lang="en-US"/>
           </a:p>
@@ -923,7 +924,7 @@
           <a:p>
             <a:fld id="{99FC01E8-584B-4C28-BA44-ECE0F23D4DC2}" type="datetimeFigureOut">
               <a:rPr lang="en-US" smtClean="0"/>
-              <a:t>6/17/2024</a:t>
+              <a:t>6/18/2024</a:t>
             </a:fld>
             <a:endParaRPr lang="en-US"/>
           </a:p>
@@ -1198,7 +1199,7 @@
           <a:p>
             <a:fld id="{99FC01E8-584B-4C28-BA44-ECE0F23D4DC2}" type="datetimeFigureOut">
               <a:rPr lang="en-US" smtClean="0"/>
-              <a:t>6/17/2024</a:t>
+              <a:t>6/18/2024</a:t>
             </a:fld>
             <a:endParaRPr lang="en-US"/>
           </a:p>
@@ -1463,7 +1464,7 @@
           <a:p>
             <a:fld id="{99FC01E8-584B-4C28-BA44-ECE0F23D4DC2}" type="datetimeFigureOut">
               <a:rPr lang="en-US" smtClean="0"/>
-              <a:t>6/17/2024</a:t>
+              <a:t>6/18/2024</a:t>
             </a:fld>
             <a:endParaRPr lang="en-US"/>
           </a:p>
@@ -1875,7 +1876,7 @@
           <a:p>
             <a:fld id="{99FC01E8-584B-4C28-BA44-ECE0F23D4DC2}" type="datetimeFigureOut">
               <a:rPr lang="en-US" smtClean="0"/>
-              <a:t>6/17/2024</a:t>
+              <a:t>6/18/2024</a:t>
             </a:fld>
             <a:endParaRPr lang="en-US"/>
           </a:p>
@@ -2016,7 +2017,7 @@
           <a:p>
             <a:fld id="{99FC01E8-584B-4C28-BA44-ECE0F23D4DC2}" type="datetimeFigureOut">
               <a:rPr lang="en-US" smtClean="0"/>
-              <a:t>6/17/2024</a:t>
+              <a:t>6/18/2024</a:t>
             </a:fld>
             <a:endParaRPr lang="en-US"/>
           </a:p>
@@ -2129,7 +2130,7 @@
           <a:p>
             <a:fld id="{99FC01E8-584B-4C28-BA44-ECE0F23D4DC2}" type="datetimeFigureOut">
               <a:rPr lang="en-US" smtClean="0"/>
-              <a:t>6/17/2024</a:t>
+              <a:t>6/18/2024</a:t>
             </a:fld>
             <a:endParaRPr lang="en-US"/>
           </a:p>
@@ -2440,7 +2441,7 @@
           <a:p>
             <a:fld id="{99FC01E8-584B-4C28-BA44-ECE0F23D4DC2}" type="datetimeFigureOut">
               <a:rPr lang="en-US" smtClean="0"/>
-              <a:t>6/17/2024</a:t>
+              <a:t>6/18/2024</a:t>
             </a:fld>
             <a:endParaRPr lang="en-US"/>
           </a:p>
@@ -2728,7 +2729,7 @@
           <a:p>
             <a:fld id="{99FC01E8-584B-4C28-BA44-ECE0F23D4DC2}" type="datetimeFigureOut">
               <a:rPr lang="en-US" smtClean="0"/>
-              <a:t>6/17/2024</a:t>
+              <a:t>6/18/2024</a:t>
             </a:fld>
             <a:endParaRPr lang="en-US"/>
           </a:p>
@@ -2969,7 +2970,7 @@
           <a:p>
             <a:fld id="{99FC01E8-584B-4C28-BA44-ECE0F23D4DC2}" type="datetimeFigureOut">
               <a:rPr lang="en-US" smtClean="0"/>
-              <a:t>6/17/2024</a:t>
+              <a:t>6/18/2024</a:t>
             </a:fld>
             <a:endParaRPr lang="en-US"/>
           </a:p>
@@ -6494,7 +6495,15 @@
             </a:r>
             <a:r>
               <a:rPr lang="en-US" dirty="0"/>
-              <a:t> (The file also has a link to a Flex 9.1 sample project used in this document, as well as the three PowerPoint presentations.)</a:t>
+              <a:t> (The file also has a link to a Flex 9.1 sample project used in this document, as well as </a:t>
+            </a:r>
+            <a:r>
+              <a:rPr lang="en-US"/>
+              <a:t>links to the </a:t>
+            </a:r>
+            <a:r>
+              <a:rPr lang="en-US" dirty="0"/>
+              <a:t>three PowerPoint presentations.)</a:t>
             </a:r>
             <a:br>
               <a:rPr lang="en-US" dirty="0"/>
@@ -17298,7 +17307,7 @@
         </p:spPr>
         <p:txBody>
           <a:bodyPr>
-            <a:normAutofit fontScale="90000"/>
+            <a:normAutofit/>
           </a:bodyPr>
           <a:lstStyle/>
           <a:p>
@@ -19071,6 +19080,112 @@
 </p:sld>
 </file>
 
+<file path=ppt/slides/slide62.xml><?xml version="1.0" encoding="utf-8"?>
+<p:sld xmlns:a="http://schemas.openxmlformats.org/drawingml/2006/main" xmlns:r="http://schemas.openxmlformats.org/officeDocument/2006/relationships" xmlns:p="http://schemas.openxmlformats.org/presentationml/2006/main">
+  <p:cSld>
+    <p:spTree>
+      <p:nvGrpSpPr>
+        <p:cNvPr id="1" name=""/>
+        <p:cNvGrpSpPr/>
+        <p:nvPr/>
+      </p:nvGrpSpPr>
+      <p:grpSpPr>
+        <a:xfrm>
+          <a:off x="0" y="0"/>
+          <a:ext cx="0" cy="0"/>
+          <a:chOff x="0" y="0"/>
+          <a:chExt cx="0" cy="0"/>
+        </a:xfrm>
+      </p:grpSpPr>
+      <p:sp>
+        <p:nvSpPr>
+          <p:cNvPr id="2" name="Title 1">
+            <a:extLst>
+              <a:ext uri="{FF2B5EF4-FFF2-40B4-BE49-F238E27FC236}">
+                <a16:creationId xmlns:a16="http://schemas.microsoft.com/office/drawing/2014/main" id="{92F29BEC-E394-43B5-AD07-90615C71DDF7}"/>
+              </a:ext>
+            </a:extLst>
+          </p:cNvPr>
+          <p:cNvSpPr>
+            <a:spLocks noGrp="1"/>
+          </p:cNvSpPr>
+          <p:nvPr>
+            <p:ph type="title"/>
+          </p:nvPr>
+        </p:nvSpPr>
+        <p:spPr/>
+        <p:txBody>
+          <a:bodyPr/>
+          <a:lstStyle/>
+          <a:p>
+            <a:r>
+              <a:rPr lang="en-US" dirty="0"/>
+              <a:t>Documentation</a:t>
+            </a:r>
+          </a:p>
+        </p:txBody>
+      </p:sp>
+      <p:sp>
+        <p:nvSpPr>
+          <p:cNvPr id="3" name="Content Placeholder 2">
+            <a:extLst>
+              <a:ext uri="{FF2B5EF4-FFF2-40B4-BE49-F238E27FC236}">
+                <a16:creationId xmlns:a16="http://schemas.microsoft.com/office/drawing/2014/main" id="{8D81C8F6-CD22-4D30-ACCD-17AB4B85D7BD}"/>
+              </a:ext>
+            </a:extLst>
+          </p:cNvPr>
+          <p:cNvSpPr>
+            <a:spLocks noGrp="1"/>
+          </p:cNvSpPr>
+          <p:nvPr>
+            <p:ph idx="1"/>
+          </p:nvPr>
+        </p:nvSpPr>
+        <p:spPr/>
+        <p:txBody>
+          <a:bodyPr/>
+          <a:lstStyle/>
+          <a:p>
+            <a:r>
+              <a:rPr lang="en-US" dirty="0"/>
+              <a:t>FLEx 9.1 Conceptual Model documentation covered in these webinars is available as “FLEx 9.1 Conceptual model.pdf”</a:t>
+            </a:r>
+            <a:br>
+              <a:rPr lang="en-US" dirty="0"/>
+            </a:br>
+            <a:r>
+              <a:rPr lang="en-US" dirty="0"/>
+              <a:t>in software.sil.org/fieldworks/support/technical-documents</a:t>
+            </a:r>
+            <a:br>
+              <a:rPr lang="en-US" dirty="0"/>
+            </a:br>
+            <a:r>
+              <a:rPr lang="en-US" dirty="0">
+                <a:hlinkClick r:id="rId2"/>
+              </a:rPr>
+              <a:t>https://downloads.languagetechnology.org/fieldworks/Documentation/FLEx%209.1%20Conceptual%20Model.pdf</a:t>
+            </a:r>
+            <a:r>
+              <a:rPr lang="en-US" dirty="0"/>
+              <a:t> (The file also has a link to a Flex 9.1 sample project used in this document, as well as the three PowerPoint presentations.)</a:t>
+            </a:r>
+          </a:p>
+        </p:txBody>
+      </p:sp>
+    </p:spTree>
+    <p:extLst>
+      <p:ext uri="{BB962C8B-B14F-4D97-AF65-F5344CB8AC3E}">
+        <p14:creationId xmlns:p14="http://schemas.microsoft.com/office/powerpoint/2010/main" val="2574577854"/>
+      </p:ext>
+    </p:extLst>
+  </p:cSld>
+  <p:clrMapOvr>
+    <a:masterClrMapping/>
+  </p:clrMapOvr>
+</p:sld>
+</file>
+
 <file path=ppt/slides/slide7.xml><?xml version="1.0" encoding="utf-8"?>
 <p:sld xmlns:a="http://schemas.openxmlformats.org/drawingml/2006/main" xmlns:r="http://schemas.openxmlformats.org/officeDocument/2006/relationships" xmlns:p="http://schemas.openxmlformats.org/presentationml/2006/main">
   <p:cSld>
@@ -19668,7 +19783,15 @@
             </a:r>
             <a:r>
               <a:rPr lang="en-US" dirty="0"/>
-              <a:t> and will store this in C:\ProgramData\SIL\SldrCache and in the global store in addition to the local project.</a:t>
+              <a:t> and will store this in C:\ProgramData\SIL\SldrCache and in the global store in addition to the local project. (</a:t>
+            </a:r>
+            <a:r>
+              <a:rPr lang="en-US" dirty="0" err="1"/>
+              <a:t>langtags.json</a:t>
+            </a:r>
+            <a:r>
+              <a:rPr lang="en-US" dirty="0"/>
+              <a:t> lists all valid language codes)</a:t>
             </a:r>
           </a:p>
           <a:p>

--- a/HelpResourcesSources/TechnicalNotes/FLEx 9.1 Conceptual Model-basic concepts and resources.pptx
+++ b/HelpResourcesSources/TechnicalNotes/FLEx 9.1 Conceptual Model-basic concepts and resources.pptx
@@ -320,7 +320,7 @@
           <a:p>
             <a:fld id="{99FC01E8-584B-4C28-BA44-ECE0F23D4DC2}" type="datetimeFigureOut">
               <a:rPr lang="en-US" smtClean="0"/>
-              <a:t>6/18/2024</a:t>
+              <a:t>6/25/2024</a:t>
             </a:fld>
             <a:endParaRPr lang="en-US"/>
           </a:p>
@@ -518,7 +518,7 @@
           <a:p>
             <a:fld id="{99FC01E8-584B-4C28-BA44-ECE0F23D4DC2}" type="datetimeFigureOut">
               <a:rPr lang="en-US" smtClean="0"/>
-              <a:t>6/18/2024</a:t>
+              <a:t>6/25/2024</a:t>
             </a:fld>
             <a:endParaRPr lang="en-US"/>
           </a:p>
@@ -726,7 +726,7 @@
           <a:p>
             <a:fld id="{99FC01E8-584B-4C28-BA44-ECE0F23D4DC2}" type="datetimeFigureOut">
               <a:rPr lang="en-US" smtClean="0"/>
-              <a:t>6/18/2024</a:t>
+              <a:t>6/25/2024</a:t>
             </a:fld>
             <a:endParaRPr lang="en-US"/>
           </a:p>
@@ -924,7 +924,7 @@
           <a:p>
             <a:fld id="{99FC01E8-584B-4C28-BA44-ECE0F23D4DC2}" type="datetimeFigureOut">
               <a:rPr lang="en-US" smtClean="0"/>
-              <a:t>6/18/2024</a:t>
+              <a:t>6/25/2024</a:t>
             </a:fld>
             <a:endParaRPr lang="en-US"/>
           </a:p>
@@ -1199,7 +1199,7 @@
           <a:p>
             <a:fld id="{99FC01E8-584B-4C28-BA44-ECE0F23D4DC2}" type="datetimeFigureOut">
               <a:rPr lang="en-US" smtClean="0"/>
-              <a:t>6/18/2024</a:t>
+              <a:t>6/25/2024</a:t>
             </a:fld>
             <a:endParaRPr lang="en-US"/>
           </a:p>
@@ -1464,7 +1464,7 @@
           <a:p>
             <a:fld id="{99FC01E8-584B-4C28-BA44-ECE0F23D4DC2}" type="datetimeFigureOut">
               <a:rPr lang="en-US" smtClean="0"/>
-              <a:t>6/18/2024</a:t>
+              <a:t>6/25/2024</a:t>
             </a:fld>
             <a:endParaRPr lang="en-US"/>
           </a:p>
@@ -1876,7 +1876,7 @@
           <a:p>
             <a:fld id="{99FC01E8-584B-4C28-BA44-ECE0F23D4DC2}" type="datetimeFigureOut">
               <a:rPr lang="en-US" smtClean="0"/>
-              <a:t>6/18/2024</a:t>
+              <a:t>6/25/2024</a:t>
             </a:fld>
             <a:endParaRPr lang="en-US"/>
           </a:p>
@@ -2017,7 +2017,7 @@
           <a:p>
             <a:fld id="{99FC01E8-584B-4C28-BA44-ECE0F23D4DC2}" type="datetimeFigureOut">
               <a:rPr lang="en-US" smtClean="0"/>
-              <a:t>6/18/2024</a:t>
+              <a:t>6/25/2024</a:t>
             </a:fld>
             <a:endParaRPr lang="en-US"/>
           </a:p>
@@ -2130,7 +2130,7 @@
           <a:p>
             <a:fld id="{99FC01E8-584B-4C28-BA44-ECE0F23D4DC2}" type="datetimeFigureOut">
               <a:rPr lang="en-US" smtClean="0"/>
-              <a:t>6/18/2024</a:t>
+              <a:t>6/25/2024</a:t>
             </a:fld>
             <a:endParaRPr lang="en-US"/>
           </a:p>
@@ -2441,7 +2441,7 @@
           <a:p>
             <a:fld id="{99FC01E8-584B-4C28-BA44-ECE0F23D4DC2}" type="datetimeFigureOut">
               <a:rPr lang="en-US" smtClean="0"/>
-              <a:t>6/18/2024</a:t>
+              <a:t>6/25/2024</a:t>
             </a:fld>
             <a:endParaRPr lang="en-US"/>
           </a:p>
@@ -2729,7 +2729,7 @@
           <a:p>
             <a:fld id="{99FC01E8-584B-4C28-BA44-ECE0F23D4DC2}" type="datetimeFigureOut">
               <a:rPr lang="en-US" smtClean="0"/>
-              <a:t>6/18/2024</a:t>
+              <a:t>6/25/2024</a:t>
             </a:fld>
             <a:endParaRPr lang="en-US"/>
           </a:p>
@@ -2970,7 +2970,7 @@
           <a:p>
             <a:fld id="{99FC01E8-584B-4C28-BA44-ECE0F23D4DC2}" type="datetimeFigureOut">
               <a:rPr lang="en-US" smtClean="0"/>
-              <a:t>6/18/2024</a:t>
+              <a:t>6/25/2024</a:t>
             </a:fld>
             <a:endParaRPr lang="en-US"/>
           </a:p>
@@ -3445,7 +3445,7 @@
           <a:lstStyle/>
           <a:p>
             <a:r>
-              <a:rPr lang="en-US" dirty="0">
+              <a:rPr lang="en-US" b="1" dirty="0">
                 <a:latin typeface="+mn-lt"/>
               </a:rPr>
               <a:t>FLEx 9.1 Conceptual Model</a:t>
@@ -3475,7 +3475,7 @@
           <a:lstStyle/>
           <a:p>
             <a:r>
-              <a:rPr lang="en-US" sz="4800" dirty="0"/>
+              <a:rPr lang="en-US" sz="4800" b="1" dirty="0"/>
               <a:t>Basic concepts and resources</a:t>
             </a:r>
             <a:br>
